--- a/docs/IT運用アウトソーシング_構造転換ストーリー.pptx
+++ b/docs/IT運用アウトソーシング_構造転換ストーリー.pptx
@@ -4076,7 +4076,28 @@
                 <a:ea typeface="Meiryo UI" pitchFamily="34" charset="-122"/>
                 <a:cs typeface="Meiryo UI" pitchFamily="34" charset="-120"/>
               </a:rPr>
-              <a:t>隠れ工数 12FTE ＝ 年1.4億円 が運用に消失</a:t>
+              <a:t>ベンダ品質が低く、指示・督促・手戻り対応などディレクション工数を社員が肩代わり（3FTE・年0.4億円）</a:t>
+            </a:r>
+            <a:endParaRPr lang="en-US" sz="1150" dirty="0"/>
+          </a:p>
+          <a:p>
+            <a:pPr marL="101600" indent="-101600">
+              <a:spcAft>
+                <a:spcPts val="300"/>
+              </a:spcAft>
+              <a:buSzPct val="100000"/>
+              <a:buChar char="•"/>
+            </a:pPr>
+            <a:r>
+              <a:rPr lang="en-US" sz="1150" dirty="0">
+                <a:solidFill>
+                  <a:srgbClr val="1F2A24"/>
+                </a:solidFill>
+                <a:latin typeface="Meiryo UI" pitchFamily="34" charset="0"/>
+                <a:ea typeface="Meiryo UI" pitchFamily="34" charset="-122"/>
+                <a:cs typeface="Meiryo UI" pitchFamily="34" charset="-120"/>
+              </a:rPr>
+              <a:t>隠れ工数 計12FTE ＝ 年1.4億円 が運用に消失</a:t>
             </a:r>
             <a:endParaRPr lang="en-US" sz="1150" dirty="0"/>
           </a:p>
@@ -4301,7 +4322,7 @@
                 <a:ea typeface="Meiryo UI" pitchFamily="34" charset="-122"/>
                 <a:cs typeface="Meiryo UI" pitchFamily="34" charset="-120"/>
               </a:rPr>
-              <a:t>TCO・SLA/KPIが未整備で測定不能</a:t>
+              <a:t>TCO・SLA/KPIが未整備で測定不能、障害復旧は個人依存</a:t>
             </a:r>
             <a:endParaRPr lang="en-US" sz="1150" dirty="0"/>
           </a:p>
@@ -4322,7 +4343,7 @@
                 <a:ea typeface="Meiryo UI" pitchFamily="34" charset="-122"/>
                 <a:cs typeface="Meiryo UI" pitchFamily="34" charset="-120"/>
               </a:rPr>
-              <a:t>障害復旧が個人の稼働に依存</a:t>
+              <a:t>品質基準が契約になく、低品質でも是正・減額を求める根拠がない</a:t>
             </a:r>
             <a:endParaRPr lang="en-US" sz="1150" dirty="0"/>
           </a:p>
